--- a/site/clases/parte-1-machine-learning-clasico/076-calibracion-de-probabilidades-platt-isotonic/clase-076-calibracion-de-probabilidades-platt-isotonic-presentacion.pptx
+++ b/site/clases/parte-1-machine-learning-clasico/076-calibracion-de-probabilidades-platt-isotonic/clase-076-calibracion-de-probabilidades-platt-isotonic-presentacion.pptx
@@ -3272,7 +3272,7 @@
                 </a:solidFill>
                 <a:latin typeface="Segoe UI"/>
               </a:rPr>
-              <a:t>Parte: 1 — Machine Learning Clásico · Fuente: Platt (1999) + Niculescu-Mizil &amp; Caruana (2005) + Guo et al. (2017).  Duración estimada: 75 min.</a:t>
+              <a:t>Parte: 1 — Machine Learning Clásico · Fuente: Platt (1999) + Niculescu-Mizil &amp; Caruana (2005) + Guo et al. (2017).  Duración estimada: 75 min. · Nivel: Intermedio</a:t>
             </a:r>
           </a:p>
         </p:txBody>
@@ -3581,7 +3581,7 @@
                 </a:solidFill>
                 <a:latin typeface="Segoe UI"/>
               </a:rPr>
-              <a:t>Parte: 1 — Machine Learning Clásico · Fuente: Platt (1999) + Niculescu-Mizil &amp; Caruana (2005) + Guo et al. (2017).  Duración estimada: 75 min.</a:t>
+              <a:t>Parte: 1 — Machine Learning Clásico · Fuente: Platt (1999) + Niculescu-Mizil &amp; Caruana (2005) + Guo et al. (2017).  Duración estimada: 75 min. · Nivel: Intermedio</a:t>
             </a:r>
           </a:p>
         </p:txBody>
@@ -4823,7 +4823,7 @@
                 </a:solidFill>
                 <a:latin typeface="Segoe UI"/>
               </a:rPr>
-              <a:t>GBM out-of-the-box suele estar mal calibrado. Reliability curve + Brier + ECE, después CalibratedClassifierCV con sigmoid e isotonic.</a:t>
+              <a:t>Un modelo puede acertar el orden (rankear bien quién es más probable que sea positivo) y a la vez mentir en la probabilidad: decir "0.9" cuando en realidad solo el 60% de esos casos resultan positivos. Calibrar es ajustar esas probabilidades para que un "0.8" signifique de verdad 80%. No cambia el ranking ni el AUC — cambia la escala: convierte el score en una probabilidad honesta que sí podés usar para decidir umbrales, costos o riesgos.</a:t>
             </a:r>
           </a:p>
         </p:txBody>
